--- a/VC-2026-035-014_ProyectoFinal_ES.pptx
+++ b/VC-2026-035-014_ProyectoFinal_ES.pptx
@@ -116,7 +116,7 @@
   <p:extLst>
     <p:ext uri="{521415D9-36F7-43E2-AB2F-B90AF26B5E84}">
       <p14:sectionLst xmlns:p14="http://schemas.microsoft.com/office/powerpoint/2010/main">
-        <p14:section name="Parte A · La herramienta" id="{32af0c5d-2a63-a5eb-76fc-35659a488dc1}">
+        <p14:section name="Parte A · La herramienta" id="{ecabfacd-af0f-36e0-1818-27b5622a23bb}">
           <p14:sldIdLst>
             <p14:sldId id="256"/>
             <p14:sldId id="257"/>
@@ -126,7 +126,7 @@
             <p14:sldId id="261"/>
           </p14:sldIdLst>
         </p14:section>
-        <p14:section name="Parte B · Demostración" id="{42575d45-0717-1379-3948-e5acc5044a23}">
+        <p14:section name="Parte B · Demostración" id="{3ef53017-1263-805c-32a3-54f8d2b40dc6}">
           <p14:sldIdLst>
             <p14:sldId id="262"/>
             <p14:sldId id="263"/>
@@ -539,7 +539,7 @@
             <a:r>
               <a:rPr lang="en-US" dirty="0"/>
               <a:t>Diapositiva 1 · Portada · 15 s
-Presentamos el Asistente Trazable para Revisiones de Alcance. Somos Darwin Pillo, de la P U C E Ibarra. Y Julianna Montes de Oca, de la U T E. Extrae datos sin perder su origen.</a:t>
+Presentamos el Asistente Trazable para Revisiones de Alcance. Somos Darwin Pillo, de la U T P L. Y Julianna Montes de Oca, de la U T E. Extrae datos sin perder su origen.</a:t>
             </a:r>
             <a:endParaRPr lang="en-US" dirty="0"/>
           </a:p>
@@ -1466,7 +1466,7 @@
                   <a:schemeClr val="accent6"/>
                 </a:solidFill>
               </a:rPr>
-              <a:t>Vibe Coding CEDIA 2026 · Universidad UTE · PUCE Ibarra</a:t>
+              <a:t>Vibe Coding CEDIA 2026 · Universidad UTE · UTPL</a:t>
             </a:r>
             <a:endParaRPr lang="en-US" sz="1200" dirty="0"/>
           </a:p>
@@ -1615,7 +1615,7 @@
                   <a:schemeClr val="tx2"/>
                 </a:solidFill>
               </a:rPr>
-              <a:t>Vibe Coding CEDIA 2026 · Universidad UTE · PUCE Ibarra</a:t>
+              <a:t>Vibe Coding CEDIA 2026 · Universidad UTE · UTPL</a:t>
             </a:r>
             <a:endParaRPr lang="en-US" sz="1200" dirty="0"/>
           </a:p>
@@ -1806,7 +1806,7 @@
                   <a:schemeClr val="tx2"/>
                 </a:solidFill>
               </a:rPr>
-              <a:t>Vibe Coding CEDIA 2026 · Universidad UTE · PUCE Ibarra</a:t>
+              <a:t>Vibe Coding CEDIA 2026 · Universidad UTE · UTPL</a:t>
             </a:r>
             <a:endParaRPr lang="en-US" sz="1200" dirty="0"/>
           </a:p>
@@ -2443,7 +2443,7 @@
                   <a:srgbClr val="C9CEDB"/>
                 </a:solidFill>
               </a:rPr>
-              <a:t>  ·  PUCE Ibarra</a:t>
+              <a:t>  ·  UTPL</a:t>
             </a:r>
             <a:endParaRPr lang="en-US" sz="2200" dirty="0"/>
           </a:p>
@@ -3199,7 +3199,7 @@
                   <a:srgbClr val="C9CEDB"/>
                 </a:solidFill>
               </a:rPr>
-              <a:t>Darwin Pillo · PUCE Ibarra</a:t>
+              <a:t>Darwin Pillo · UTPL</a:t>
             </a:r>
             <a:endParaRPr lang="en-US" sz="2000" dirty="0"/>
           </a:p>
